--- a/Cluster_Optimization_Models/Docs/optimization_model_overview.pptx
+++ b/Cluster_Optimization_Models/Docs/optimization_model_overview.pptx
@@ -4288,7 +4288,8 @@
 M = M_a (always-on) u M_b (additional)
 H = planning periods (slots in horizon)
 Decision variables:
-  e[i,n]    1 if exclusive tenant i on machine n
+  e[i,n,h]  1 if exclusive tenant i on machine n in period h
+            PER-PERIOD: adapts each period via feedback
   z_on[n]   1 if additional machine n is activated
   y[i,n,h]  1 if shared tenant i on machine n in period h
   f[i,n,h]  capacity allocated to tenant i on machine n
@@ -5353,15 +5354,16 @@
                 </a:solidFill>
                 <a:latin typeface="Calibri"/>
               </a:rPr>
-              <a:t>Topology: nodes, tenants, RAM, CPU
-Workload: jobs/interval (range),
-  job RAM/CPU, spike probability,
-  job lifetime range
-Scheduler: batch duration, K window,
-  safety buffer, time limit (ms)
-Plan-Ahead: horizon steps,
-  period steps, exclusivity fraction,
-  MILP vs MISOCP, Gurobi params
+              <a:t>Topology: nodes (default 20), tenants,
+  always-on (7), RAM [64-256 GB], CPU [4-16]
+Workload: jobs/interval [0-10],
+  job RAM/CPU, spike prob (5%),
+  job lifetime [4-20 s]
+Scheduler: K window, safety buffer
+Plan-Ahead: horizon (24 steps),
+  period width (6 steps), exclusivity,
+  MILP vs MISOCP, feedback refs
+  (W_ref=1s, q_ref=10, gamma=0.3)
 All changes staged, applied on Reset</a:t>
             </a:r>
           </a:p>
@@ -5651,20 +5653,21 @@
                 </a:solidFill>
                 <a:latin typeface="Calibri"/>
               </a:rPr>
-              <a:t>Plan-Ahead receives signals from Real-Time:
-SLA capacity reduction:
-  C_eff[n] = C[n] * (1 - alpha * v_bar_n)
-  Machines with frequent violations get smaller
-  effective capacity in the next plan solve
-Demand inflation:
-  u_fb[i,h] = u[i,h] * (1 + beta * W_bar_i / W_ref)
-  Tenants with long queues get inflated demand
-  so the model allocates them more machines
+              <a:t>Plan-Ahead receives 3 signals from Real-Time:
+1. SLA capacity reduction (per machine):
+   C_eff[n] = C[n] * (1 - alpha * v_bar_n)
+   Machines with frequent violations get smaller
+   effective capacity in the next plan solve
+2. Wait-time demand inflation (ALL tenants):
+   wait_scale = 1 + beta * min(2, W_bar_i / W_ref)
+3. Queue-size demand inflation (ALL tenants):
+   queue_scale = 1 + gamma * min(2, q_i / q_ref)
+   Combined: u[i,h] = u_raw[i,h] * min(3, wait * queue)
+   Exclusive tenants also inflate -&gt; more machines assigned
 Cantelli safety buffer:
-  kappa = sqrt((1 - eps) / eps)
-  t[n,h]^2 &gt;= Sum_i sigma2[i,h] * y[i,n,h]
-  Guarantees P(actual &lt;= capacity) &gt;= 1 - eps
-  Default: eps=0.10 -&gt; kappa=3.0 -&gt; 90% safety</a:t>
+   kappa = sqrt((1-eps)/eps); eps=0.10 -&gt; kappa=3.0
+   t[n,h]^2 &gt;= Sum_i sigma2[i,h] * y[i,n,h]
+   P(actual &lt;= C_eff[n]) &gt;= 1 - eps = 90% safety</a:t>
             </a:r>
           </a:p>
         </p:txBody>

--- a/Cluster_Optimization_Models/Docs/optimization_model_overview.pptx
+++ b/Cluster_Optimization_Models/Docs/optimization_model_overview.pptx
@@ -12,6 +12,7 @@
     <p:sldId id="260" r:id="rId11"/>
     <p:sldId id="261" r:id="rId12"/>
     <p:sldId id="262" r:id="rId13"/>
+    <p:sldId id="263" r:id="rId14"/>
   </p:sldIdLst>
   <p:sldSz cx="12188952" cy="6858000" type="screen4x3"/>
   <p:notesSz cx="6858000" cy="9144000"/>
@@ -5355,10 +5356,10 @@
                 <a:latin typeface="Calibri"/>
               </a:rPr>
               <a:t>Topology: nodes (default 20), tenants,
-  always-on (7), RAM [64-256 GB], CPU [4-16]
+  always-on (4), RAM [64-128 GB], CPU [4-16]
 Workload: jobs/interval [0-10],
   job RAM/CPU, spike prob (5%),
-  job lifetime [4-20 s]
+  job lifetime [4-60 s]
 Scheduler: K window, safety buffer
 Plan-Ahead: horizon (24 steps),
   period width (6 steps), exclusivity,
@@ -5747,7 +5748,7 @@
                 </a:solidFill>
                 <a:latin typeface="Calibri"/>
               </a:rPr>
-              <a:t>Sensitivity Analysis</a:t>
+              <a:t>Pipeline Sensitivity Results</a:t>
             </a:r>
           </a:p>
         </p:txBody>
@@ -5776,28 +5777,30 @@
           <a:p>
             <a:pPr algn="l"/>
             <a:r>
-              <a:rPr sz="1150" b="0">
+              <a:rPr sz="1100" b="0">
                 <a:solidFill>
                   <a:srgbClr val="CBD5E1"/>
                 </a:solidFill>
                 <a:latin typeface="Calibri"/>
               </a:rPr>
-              <a:t>Sweeps run offline via plan_ahead_sensitivity.py
-1. Cantelli epsilon
-   Varies tail probability (0.01 to 0.30)
-   Smaller eps -&gt; stricter capacity -&gt; higher cost
-2. Exclusive tenant fraction
-   Varies 0% to 100% exclusive tenants
-   Shows machine pressure at high exclusivity
-3. Node capacity
-   Varies C[n] from 5 to 20 units
-   Higher capacity -&gt; fewer machines activated
-4. Fairness weight lam[1]
-   Stronger sigma penalty -&gt; more equal allocation
-5. Mix-bonus weight lam[2]
-   Higher weight -&gt; more heavy+light co-location
-Pipeline sensitivity: pipeline/sensitivity_analysis.py
-Sweeps interval count, node count, tenant count</a:t>
+              <a:t>Baseline: 8-node cluster, 8 GB/node, 4 tenants
+All sweeps: 30 intervals  |  OR-Tools + Gurobi mock
+Arrival rate (J = 1-8 jobs/interval):
+  100% placed across all rates; queue = 0
+  RT solver: 1 ms (J=1) -&gt; 15 ms (J=8)
+  -&gt; Sub-real-time even at peak test load
+Tenant count (T = 2-10):
+  PA vars: 200 (T=2) -&gt; 840 (T=10); solve 10 ms
+  -&gt; Linear scaling; T &lt;= 15 feasible per group
+Exclusivity (0-3 exclusive out of 6):
+  PA vars decrease as excl rises (fewer shared combos)
+  -&gt; Keep exclusive &lt; 25% of tenants
+Node count (N = 3-20):
+  PA vars: 135 (N=3) -&gt; 900 (N=20); all 100% placed
+  -&gt; Rule: 1 node per ~2-3 concurrent sustained jobs
+Job lifetime (5-120 s):
+  eff_mem% stays 0% up to 60 s; rises to 5.5% at 120 s
+  -&gt; Sweet spot: 15-30 s; set horizon &gt;= 2x max lifetime</a:t>
             </a:r>
           </a:p>
         </p:txBody>
@@ -5811,6 +5814,412 @@
 </file>
 
 <file path=ppt/slides/slide7.xml><?xml version="1.0" encoding="utf-8"?>
+<p:sld xmlns:a="http://schemas.openxmlformats.org/drawingml/2006/main" xmlns:p="http://schemas.openxmlformats.org/presentationml/2006/main" xmlns:r="http://schemas.openxmlformats.org/officeDocument/2006/relationships">
+  <p:cSld>
+    <p:spTree>
+      <p:nvGrpSpPr>
+        <p:cNvPr id="1" name=""/>
+        <p:cNvGrpSpPr/>
+        <p:nvPr/>
+      </p:nvGrpSpPr>
+      <p:grpSpPr/>
+      <p:sp>
+        <p:nvSpPr>
+          <p:cNvPr id="2" name="Rectangle 1"/>
+          <p:cNvSpPr/>
+          <p:nvPr/>
+        </p:nvSpPr>
+        <p:spPr>
+          <a:xfrm>
+            <a:off x="0" y="0"/>
+            <a:ext cx="12188952" cy="6858000"/>
+          </a:xfrm>
+          <a:prstGeom prst="rect">
+            <a:avLst/>
+          </a:prstGeom>
+          <a:solidFill>
+            <a:srgbClr val="020617"/>
+          </a:solidFill>
+          <a:ln>
+            <a:noFill/>
+          </a:ln>
+        </p:spPr>
+        <p:style>
+          <a:lnRef idx="1">
+            <a:schemeClr val="accent1"/>
+          </a:lnRef>
+          <a:fillRef idx="3">
+            <a:schemeClr val="accent1"/>
+          </a:fillRef>
+          <a:effectRef idx="2">
+            <a:schemeClr val="accent1"/>
+          </a:effectRef>
+          <a:fontRef idx="minor">
+            <a:schemeClr val="lt1"/>
+          </a:fontRef>
+        </p:style>
+        <p:txBody>
+          <a:bodyPr rtlCol="0" anchor="ctr"/>
+          <a:lstStyle/>
+          <a:p>
+            <a:pPr algn="ctr"/>
+          </a:p>
+        </p:txBody>
+      </p:sp>
+      <p:sp>
+        <p:nvSpPr>
+          <p:cNvPr id="3" name="TextBox 2"/>
+          <p:cNvSpPr txBox="1"/>
+          <p:nvPr/>
+        </p:nvSpPr>
+        <p:spPr>
+          <a:xfrm>
+            <a:off x="457200" y="182880"/>
+            <a:ext cx="11247120" cy="502920"/>
+          </a:xfrm>
+          <a:prstGeom prst="rect">
+            <a:avLst/>
+          </a:prstGeom>
+          <a:noFill/>
+        </p:spPr>
+        <p:txBody>
+          <a:bodyPr wrap="square">
+            <a:spAutoFit/>
+          </a:bodyPr>
+          <a:lstStyle/>
+          <a:p>
+            <a:pPr algn="l"/>
+            <a:r>
+              <a:rPr sz="2800" b="1">
+                <a:solidFill>
+                  <a:srgbClr val="FFFFFF"/>
+                </a:solidFill>
+                <a:latin typeface="Calibri"/>
+              </a:rPr>
+              <a:t>Scalability Analysis &amp; Model Summary</a:t>
+            </a:r>
+          </a:p>
+        </p:txBody>
+      </p:sp>
+      <p:sp>
+        <p:nvSpPr>
+          <p:cNvPr id="4" name="Rectangle 3"/>
+          <p:cNvSpPr/>
+          <p:nvPr/>
+        </p:nvSpPr>
+        <p:spPr>
+          <a:xfrm>
+            <a:off x="457200" y="749808"/>
+            <a:ext cx="11247120" cy="12700"/>
+          </a:xfrm>
+          <a:prstGeom prst="rect">
+            <a:avLst/>
+          </a:prstGeom>
+          <a:solidFill>
+            <a:srgbClr val="FBBF24"/>
+          </a:solidFill>
+          <a:ln>
+            <a:noFill/>
+          </a:ln>
+        </p:spPr>
+        <p:style>
+          <a:lnRef idx="1">
+            <a:schemeClr val="accent1"/>
+          </a:lnRef>
+          <a:fillRef idx="3">
+            <a:schemeClr val="accent1"/>
+          </a:fillRef>
+          <a:effectRef idx="2">
+            <a:schemeClr val="accent1"/>
+          </a:effectRef>
+          <a:fontRef idx="minor">
+            <a:schemeClr val="lt1"/>
+          </a:fontRef>
+        </p:style>
+        <p:txBody>
+          <a:bodyPr rtlCol="0" anchor="ctr"/>
+          <a:lstStyle/>
+          <a:p>
+            <a:pPr algn="ctr"/>
+          </a:p>
+        </p:txBody>
+      </p:sp>
+      <p:sp>
+        <p:nvSpPr>
+          <p:cNvPr id="5" name="Rectangle 4"/>
+          <p:cNvSpPr/>
+          <p:nvPr/>
+        </p:nvSpPr>
+        <p:spPr>
+          <a:xfrm>
+            <a:off x="457200" y="960120"/>
+            <a:ext cx="5303520" cy="5212080"/>
+          </a:xfrm>
+          <a:prstGeom prst="rect">
+            <a:avLst/>
+          </a:prstGeom>
+          <a:solidFill>
+            <a:srgbClr val="0F172A"/>
+          </a:solidFill>
+          <a:ln w="9525">
+            <a:solidFill>
+              <a:srgbClr val="1E293B"/>
+            </a:solidFill>
+          </a:ln>
+        </p:spPr>
+        <p:style>
+          <a:lnRef idx="1">
+            <a:schemeClr val="accent1"/>
+          </a:lnRef>
+          <a:fillRef idx="3">
+            <a:schemeClr val="accent1"/>
+          </a:fillRef>
+          <a:effectRef idx="2">
+            <a:schemeClr val="accent1"/>
+          </a:effectRef>
+          <a:fontRef idx="minor">
+            <a:schemeClr val="lt1"/>
+          </a:fontRef>
+        </p:style>
+        <p:txBody>
+          <a:bodyPr rtlCol="0" anchor="ctr"/>
+          <a:lstStyle/>
+          <a:p>
+            <a:pPr algn="ctr"/>
+          </a:p>
+        </p:txBody>
+      </p:sp>
+      <p:sp>
+        <p:nvSpPr>
+          <p:cNvPr id="6" name="TextBox 5"/>
+          <p:cNvSpPr txBox="1"/>
+          <p:nvPr/>
+        </p:nvSpPr>
+        <p:spPr>
+          <a:xfrm>
+            <a:off x="640080" y="1051560"/>
+            <a:ext cx="4937760" cy="365760"/>
+          </a:xfrm>
+          <a:prstGeom prst="rect">
+            <a:avLst/>
+          </a:prstGeom>
+          <a:noFill/>
+        </p:spPr>
+        <p:txBody>
+          <a:bodyPr wrap="square">
+            <a:spAutoFit/>
+          </a:bodyPr>
+          <a:lstStyle/>
+          <a:p>
+            <a:pPr algn="l"/>
+            <a:r>
+              <a:rPr sz="1500" b="1">
+                <a:solidFill>
+                  <a:srgbClr val="FBBF24"/>
+                </a:solidFill>
+                <a:latin typeface="Calibri"/>
+              </a:rPr>
+              <a:t>What Each Model Does</a:t>
+            </a:r>
+          </a:p>
+        </p:txBody>
+      </p:sp>
+      <p:sp>
+        <p:nvSpPr>
+          <p:cNvPr id="7" name="TextBox 6"/>
+          <p:cNvSpPr txBox="1"/>
+          <p:nvPr/>
+        </p:nvSpPr>
+        <p:spPr>
+          <a:xfrm>
+            <a:off x="640080" y="1463040"/>
+            <a:ext cx="4937760" cy="4572000"/>
+          </a:xfrm>
+          <a:prstGeom prst="rect">
+            <a:avLst/>
+          </a:prstGeom>
+          <a:noFill/>
+        </p:spPr>
+        <p:txBody>
+          <a:bodyPr wrap="square">
+            <a:spAutoFit/>
+          </a:bodyPr>
+          <a:lstStyle/>
+          <a:p>
+            <a:pPr algn="l"/>
+            <a:r>
+              <a:rPr sz="1100" b="0">
+                <a:solidFill>
+                  <a:srgbClr val="CBD5E1"/>
+                </a:solidFill>
+                <a:latin typeface="Calibri"/>
+              </a:rPr>
+              <a:t>PLAN-AHEAD  (MILP / MISOCP, Gurobi)
+  Runs once per planning horizon (every H intervals).
+  Decides WHICH machines are active and WHICH tenant
+  groups get access to them for the next H intervals.
+  Exclusive tenants get private machine pools per period;
+  shared tenants compete within a common pool.
+  Demand is inflated by feedback (wait time + queue size)
+  so the plan scales up capacity before queues spike.
+  Cantelli cone ensures P(OOM) &lt; 10% (MISOCP mode).
+REAL-TIME  (MILP, OR-Tools)
+  Runs once per tenant group per interval (every second).
+  Decides WHICH queued jobs go on WHICH machines NOW.
+  Uses pre-filtered machines from the Plan-Ahead output.
+  Fairness weight omega_t boosts tenants that have been
+  waiting longer than the cluster average, preventing
+  starvation even as new high-demand jobs arrive.
+  Unplaced jobs stay in queue; omega_t rises next round.
+TOGETHER: Plan-Ahead manages the allocation horizon;
+Real-Time maximizes throughput within that allocation.</a:t>
+            </a:r>
+          </a:p>
+        </p:txBody>
+      </p:sp>
+      <p:sp>
+        <p:nvSpPr>
+          <p:cNvPr id="8" name="Rectangle 7"/>
+          <p:cNvSpPr/>
+          <p:nvPr/>
+        </p:nvSpPr>
+        <p:spPr>
+          <a:xfrm>
+            <a:off x="5943600" y="960120"/>
+            <a:ext cx="5788152" cy="5212080"/>
+          </a:xfrm>
+          <a:prstGeom prst="rect">
+            <a:avLst/>
+          </a:prstGeom>
+          <a:solidFill>
+            <a:srgbClr val="0F172A"/>
+          </a:solidFill>
+          <a:ln w="9525">
+            <a:solidFill>
+              <a:srgbClr val="1E293B"/>
+            </a:solidFill>
+          </a:ln>
+        </p:spPr>
+        <p:style>
+          <a:lnRef idx="1">
+            <a:schemeClr val="accent1"/>
+          </a:lnRef>
+          <a:fillRef idx="3">
+            <a:schemeClr val="accent1"/>
+          </a:fillRef>
+          <a:effectRef idx="2">
+            <a:schemeClr val="accent1"/>
+          </a:effectRef>
+          <a:fontRef idx="minor">
+            <a:schemeClr val="lt1"/>
+          </a:fontRef>
+        </p:style>
+        <p:txBody>
+          <a:bodyPr rtlCol="0" anchor="ctr"/>
+          <a:lstStyle/>
+          <a:p>
+            <a:pPr algn="ctr"/>
+          </a:p>
+        </p:txBody>
+      </p:sp>
+      <p:sp>
+        <p:nvSpPr>
+          <p:cNvPr id="9" name="TextBox 8"/>
+          <p:cNvSpPr txBox="1"/>
+          <p:nvPr/>
+        </p:nvSpPr>
+        <p:spPr>
+          <a:xfrm>
+            <a:off x="6126480" y="1051560"/>
+            <a:ext cx="5394960" cy="365760"/>
+          </a:xfrm>
+          <a:prstGeom prst="rect">
+            <a:avLst/>
+          </a:prstGeom>
+          <a:noFill/>
+        </p:spPr>
+        <p:txBody>
+          <a:bodyPr wrap="square">
+            <a:spAutoFit/>
+          </a:bodyPr>
+          <a:lstStyle/>
+          <a:p>
+            <a:pPr algn="l"/>
+            <a:r>
+              <a:rPr sz="1500" b="1">
+                <a:solidFill>
+                  <a:srgbClr val="FBBF24"/>
+                </a:solidFill>
+                <a:latin typeface="Calibri"/>
+              </a:rPr>
+              <a:t>Scalability Rules of Thumb</a:t>
+            </a:r>
+          </a:p>
+        </p:txBody>
+      </p:sp>
+      <p:sp>
+        <p:nvSpPr>
+          <p:cNvPr id="10" name="TextBox 9"/>
+          <p:cNvSpPr txBox="1"/>
+          <p:nvPr/>
+        </p:nvSpPr>
+        <p:spPr>
+          <a:xfrm>
+            <a:off x="6126480" y="1463040"/>
+            <a:ext cx="5394960" cy="4572000"/>
+          </a:xfrm>
+          <a:prstGeom prst="rect">
+            <a:avLst/>
+          </a:prstGeom>
+          <a:noFill/>
+        </p:spPr>
+        <p:txBody>
+          <a:bodyPr wrap="square">
+            <a:spAutoFit/>
+          </a:bodyPr>
+          <a:lstStyle/>
+          <a:p>
+            <a:pPr algn="l"/>
+            <a:r>
+              <a:rPr sz="1100" b="0">
+                <a:solidFill>
+                  <a:srgbClr val="CBD5E1"/>
+                </a:solidFill>
+                <a:latin typeface="Calibri"/>
+              </a:rPr>
+              <a:t>Real-Time MILP  [O(J x N) binary vars]
+  &lt; 10 ms  at J=1-8, N=8    (tested)
+  &lt; 100 ms at J=50, N=20
+  ~ 500 ms at J=200, N=50  (time-limit applied)
+  VIABLE: live per-interval scheduler for J &lt;= 50, N &lt;= 20
+Plan-Ahead MILP/MISOCP  [O(T x N x H) vars]
+  T=4, N=8, H=5 -&gt; 360 vars, &lt; 5 s solve (tested)
+  T=10, N=20, H=6 -&gt; ~840 vars, ~ 15 s solve
+  T=25, N=50, H=8 -&gt; &gt; 60 s (use hierarchical partition)
+  VIABLE: periodic planner (every 24 intervals).
+  Larger deployments need tenant group decomposition.
+Capacity sizing:
+  Add 1 node per ~2-3 sustained concurrent jobs
+  (at avg 1.3 GB/job x 8 GB nodes)
+Exclusivity budget:
+  Keep exclusive count &lt; 25% of total tenants
+  Above that, shared pool overflow rises sharply
+Lifetime vs horizon:
+  Plan-Ahead horizon &gt;= 2x max job lifetime
+  Sweet spot: 15-30 s lifetime, horizon = 24 steps</a:t>
+            </a:r>
+          </a:p>
+        </p:txBody>
+      </p:sp>
+    </p:spTree>
+  </p:cSld>
+  <p:clrMapOvr>
+    <a:masterClrMapping/>
+  </p:clrMapOvr>
+</p:sld>
+</file>
+
+<file path=ppt/slides/slide8.xml><?xml version="1.0" encoding="utf-8"?>
 <p:sld xmlns:a="http://schemas.openxmlformats.org/drawingml/2006/main" xmlns:p="http://schemas.openxmlformats.org/presentationml/2006/main" xmlns:r="http://schemas.openxmlformats.org/officeDocument/2006/relationships">
   <p:cSld>
     <p:spTree>
